--- a/ml-examples/churn_prediction/slides/churn_prediction.pptx
+++ b/ml-examples/churn_prediction/slides/churn_prediction.pptx
@@ -19514,7 +19514,7 @@
           <a:p>
             <a:fld id="{840FFE86-F4EF-4C24-B61E-A4ACE1AB3F28}" type="datetimeFigureOut">
               <a:rPr lang="en-SG" smtClean="0"/>
-              <a:t>27/3/2026</a:t>
+              <a:t>30/3/2026</a:t>
             </a:fld>
             <a:endParaRPr lang="en-SG" dirty="0"/>
           </a:p>
@@ -20152,7 +20152,7 @@
           <a:p>
             <a:fld id="{DA1CC2BE-6A0F-4071-BFB7-8FB97E7BF62D}" type="datetimeFigureOut">
               <a:rPr lang="en-SG" smtClean="0"/>
-              <a:t>27/3/2026</a:t>
+              <a:t>30/3/2026</a:t>
             </a:fld>
             <a:endParaRPr lang="en-SG" dirty="0"/>
           </a:p>
@@ -20497,7 +20497,7 @@
           <a:p>
             <a:fld id="{DA1CC2BE-6A0F-4071-BFB7-8FB97E7BF62D}" type="datetimeFigureOut">
               <a:rPr lang="en-SG" smtClean="0"/>
-              <a:t>27/3/2026</a:t>
+              <a:t>30/3/2026</a:t>
             </a:fld>
             <a:endParaRPr lang="en-SG" dirty="0"/>
           </a:p>
@@ -20905,7 +20905,7 @@
           <a:p>
             <a:fld id="{DA1CC2BE-6A0F-4071-BFB7-8FB97E7BF62D}" type="datetimeFigureOut">
               <a:rPr lang="en-SG" smtClean="0"/>
-              <a:t>27/3/2026</a:t>
+              <a:t>30/3/2026</a:t>
             </a:fld>
             <a:endParaRPr lang="en-SG" dirty="0"/>
           </a:p>
@@ -21248,7 +21248,7 @@
           <a:p>
             <a:fld id="{DA1CC2BE-6A0F-4071-BFB7-8FB97E7BF62D}" type="datetimeFigureOut">
               <a:rPr lang="en-SG" smtClean="0"/>
-              <a:t>27/3/2026</a:t>
+              <a:t>30/3/2026</a:t>
             </a:fld>
             <a:endParaRPr lang="en-SG" dirty="0"/>
           </a:p>
@@ -21575,7 +21575,7 @@
           <a:p>
             <a:fld id="{DA1CC2BE-6A0F-4071-BFB7-8FB97E7BF62D}" type="datetimeFigureOut">
               <a:rPr lang="en-SG" smtClean="0"/>
-              <a:t>27/3/2026</a:t>
+              <a:t>30/3/2026</a:t>
             </a:fld>
             <a:endParaRPr lang="en-SG" dirty="0"/>
           </a:p>
@@ -21978,7 +21978,7 @@
           <a:p>
             <a:fld id="{DA1CC2BE-6A0F-4071-BFB7-8FB97E7BF62D}" type="datetimeFigureOut">
               <a:rPr lang="en-SG" smtClean="0"/>
-              <a:t>27/3/2026</a:t>
+              <a:t>30/3/2026</a:t>
             </a:fld>
             <a:endParaRPr lang="en-SG" dirty="0"/>
           </a:p>
@@ -22242,7 +22242,7 @@
           <a:p>
             <a:fld id="{DA1CC2BE-6A0F-4071-BFB7-8FB97E7BF62D}" type="datetimeFigureOut">
               <a:rPr lang="en-SG" smtClean="0"/>
-              <a:t>27/3/2026</a:t>
+              <a:t>30/3/2026</a:t>
             </a:fld>
             <a:endParaRPr lang="en-SG" dirty="0"/>
           </a:p>
@@ -22511,7 +22511,7 @@
           <a:p>
             <a:fld id="{DA1CC2BE-6A0F-4071-BFB7-8FB97E7BF62D}" type="datetimeFigureOut">
               <a:rPr lang="en-SG" smtClean="0"/>
-              <a:t>27/3/2026</a:t>
+              <a:t>30/3/2026</a:t>
             </a:fld>
             <a:endParaRPr lang="en-SG" dirty="0"/>
           </a:p>
@@ -22775,7 +22775,7 @@
           <a:p>
             <a:fld id="{DA1CC2BE-6A0F-4071-BFB7-8FB97E7BF62D}" type="datetimeFigureOut">
               <a:rPr lang="en-SG" smtClean="0"/>
-              <a:t>27/3/2026</a:t>
+              <a:t>30/3/2026</a:t>
             </a:fld>
             <a:endParaRPr lang="en-SG" dirty="0"/>
           </a:p>
@@ -22955,7 +22955,7 @@
           <a:p>
             <a:fld id="{DA1CC2BE-6A0F-4071-BFB7-8FB97E7BF62D}" type="datetimeFigureOut">
               <a:rPr lang="en-SG" smtClean="0"/>
-              <a:t>27/3/2026</a:t>
+              <a:t>30/3/2026</a:t>
             </a:fld>
             <a:endParaRPr lang="en-SG" dirty="0"/>
           </a:p>
@@ -23291,7 +23291,7 @@
           <a:p>
             <a:fld id="{DA1CC2BE-6A0F-4071-BFB7-8FB97E7BF62D}" type="datetimeFigureOut">
               <a:rPr lang="en-SG" smtClean="0"/>
-              <a:t>27/3/2026</a:t>
+              <a:t>30/3/2026</a:t>
             </a:fld>
             <a:endParaRPr lang="en-SG" dirty="0"/>
           </a:p>
@@ -23621,7 +23621,7 @@
           <a:p>
             <a:fld id="{DA1CC2BE-6A0F-4071-BFB7-8FB97E7BF62D}" type="datetimeFigureOut">
               <a:rPr lang="en-SG" smtClean="0"/>
-              <a:t>27/3/2026</a:t>
+              <a:t>30/3/2026</a:t>
             </a:fld>
             <a:endParaRPr lang="en-SG" dirty="0"/>
           </a:p>
@@ -24085,7 +24085,7 @@
           <a:p>
             <a:fld id="{DA1CC2BE-6A0F-4071-BFB7-8FB97E7BF62D}" type="datetimeFigureOut">
               <a:rPr lang="en-SG" smtClean="0"/>
-              <a:t>27/3/2026</a:t>
+              <a:t>30/3/2026</a:t>
             </a:fld>
             <a:endParaRPr lang="en-SG" dirty="0"/>
           </a:p>
@@ -24297,7 +24297,7 @@
           <a:p>
             <a:fld id="{DA1CC2BE-6A0F-4071-BFB7-8FB97E7BF62D}" type="datetimeFigureOut">
               <a:rPr lang="en-SG" smtClean="0"/>
-              <a:t>27/3/2026</a:t>
+              <a:t>30/3/2026</a:t>
             </a:fld>
             <a:endParaRPr lang="en-SG" dirty="0"/>
           </a:p>
@@ -24481,7 +24481,7 @@
           <a:p>
             <a:fld id="{DA1CC2BE-6A0F-4071-BFB7-8FB97E7BF62D}" type="datetimeFigureOut">
               <a:rPr lang="en-SG" smtClean="0"/>
-              <a:t>27/3/2026</a:t>
+              <a:t>30/3/2026</a:t>
             </a:fld>
             <a:endParaRPr lang="en-SG" dirty="0"/>
           </a:p>
@@ -24821,7 +24821,7 @@
           <a:p>
             <a:fld id="{DA1CC2BE-6A0F-4071-BFB7-8FB97E7BF62D}" type="datetimeFigureOut">
               <a:rPr lang="en-SG" smtClean="0"/>
-              <a:t>27/3/2026</a:t>
+              <a:t>30/3/2026</a:t>
             </a:fld>
             <a:endParaRPr lang="en-SG" dirty="0"/>
           </a:p>
@@ -25172,7 +25172,7 @@
           <a:p>
             <a:fld id="{DA1CC2BE-6A0F-4071-BFB7-8FB97E7BF62D}" type="datetimeFigureOut">
               <a:rPr lang="en-SG" smtClean="0"/>
-              <a:t>27/3/2026</a:t>
+              <a:t>30/3/2026</a:t>
             </a:fld>
             <a:endParaRPr lang="en-SG" dirty="0"/>
           </a:p>
@@ -27471,7 +27471,7 @@
           <a:p>
             <a:fld id="{DA1CC2BE-6A0F-4071-BFB7-8FB97E7BF62D}" type="datetimeFigureOut">
               <a:rPr lang="en-SG" smtClean="0"/>
-              <a:t>27/3/2026</a:t>
+              <a:t>30/3/2026</a:t>
             </a:fld>
             <a:endParaRPr lang="en-SG" dirty="0"/>
           </a:p>
@@ -28027,7 +28027,7 @@
             </a:br>
             <a:r>
               <a:rPr lang="en-SG" sz="4000" b="1" i="1" dirty="0"/>
-              <a:t>IBM Telco Customer Churn</a:t>
+              <a:t>Ranking‑First Retention Strategy</a:t>
             </a:r>
           </a:p>
         </p:txBody>
@@ -28057,7 +28057,7 @@
           <a:p>
             <a:r>
               <a:rPr lang="en-SG" sz="1600" i="1" dirty="0"/>
-              <a:t>Ranking‑First Retention Strategy</a:t>
+              <a:t>IBM Telco Customer Churn</a:t>
             </a:r>
           </a:p>
         </p:txBody>

--- a/ml-examples/churn_prediction/slides/churn_prediction.pptx
+++ b/ml-examples/churn_prediction/slides/churn_prediction.pptx
@@ -6344,9 +6344,13 @@
         <a:p>
           <a:r>
             <a:rPr lang="en-SG" sz="2000" b="1" dirty="0"/>
-            <a:t>Business rules</a:t>
+            <a:t>Business rules </a:t>
           </a:r>
-          <a:endParaRPr lang="en-SG" sz="2000" dirty="0"/>
+          <a:r>
+            <a:rPr lang="en-SG" sz="1000" b="0" dirty="0"/>
+            <a:t>(not implemented here)</a:t>
+          </a:r>
+          <a:endParaRPr lang="en-SG" sz="1000" dirty="0"/>
         </a:p>
       </dgm:t>
     </dgm:pt>
@@ -6611,9 +6615,13 @@
         <a:p>
           <a:r>
             <a:rPr lang="en-SG" sz="2000" b="1" dirty="0"/>
-            <a:t>Periodically retrain</a:t>
+            <a:t>Periodically retrain </a:t>
           </a:r>
-          <a:endParaRPr lang="en-SG" sz="2000" dirty="0"/>
+          <a:r>
+            <a:rPr lang="en-SG" sz="1000" b="0" dirty="0"/>
+            <a:t>(not implemented here)</a:t>
+          </a:r>
+          <a:endParaRPr lang="en-SG" sz="1000" dirty="0"/>
         </a:p>
       </dgm:t>
     </dgm:pt>
@@ -9691,8 +9699,8 @@
       </dsp:nvSpPr>
       <dsp:spPr>
         <a:xfrm>
-          <a:off x="0" y="206661"/>
-          <a:ext cx="5954607" cy="528412"/>
+          <a:off x="0" y="199330"/>
+          <a:ext cx="6291852" cy="573300"/>
         </a:xfrm>
         <a:prstGeom prst="rect">
           <a:avLst/>
@@ -9732,7 +9740,7 @@
         <a:fontRef idx="minor"/>
       </dsp:style>
       <dsp:txBody>
-        <a:bodyPr spcFirstLastPara="0" vert="horz" wrap="square" lIns="462144" tIns="229108" rIns="462144" bIns="99568" numCol="1" spcCol="1270" anchor="t" anchorCtr="0">
+        <a:bodyPr spcFirstLastPara="0" vert="horz" wrap="square" lIns="488318" tIns="270764" rIns="488318" bIns="99568" numCol="1" spcCol="1270" anchor="t" anchorCtr="0">
           <a:noAutofit/>
         </a:bodyPr>
         <a:lstStyle/>
@@ -9764,8 +9772,8 @@
         </a:p>
       </dsp:txBody>
       <dsp:txXfrm>
-        <a:off x="0" y="206661"/>
-        <a:ext cx="5954607" cy="528412"/>
+        <a:off x="0" y="199330"/>
+        <a:ext cx="6291852" cy="573300"/>
       </dsp:txXfrm>
     </dsp:sp>
     <dsp:sp modelId="{36E764A6-17A1-4966-B4DA-101E4459E36D}">
@@ -9775,8 +9783,8 @@
       </dsp:nvSpPr>
       <dsp:spPr>
         <a:xfrm>
-          <a:off x="297730" y="44301"/>
-          <a:ext cx="4168224" cy="324720"/>
+          <a:off x="314592" y="7450"/>
+          <a:ext cx="4404297" cy="383760"/>
         </a:xfrm>
         <a:prstGeom prst="roundRect">
           <a:avLst/>
@@ -9817,7 +9825,7 @@
         </a:fontRef>
       </dsp:style>
       <dsp:txBody>
-        <a:bodyPr spcFirstLastPara="0" vert="horz" wrap="square" lIns="157549" tIns="0" rIns="157549" bIns="0" numCol="1" spcCol="1270" anchor="ctr" anchorCtr="0">
+        <a:bodyPr spcFirstLastPara="0" vert="horz" wrap="square" lIns="166472" tIns="0" rIns="166472" bIns="0" numCol="1" spcCol="1270" anchor="ctr" anchorCtr="0">
           <a:noAutofit/>
         </a:bodyPr>
         <a:lstStyle/>
@@ -9842,8 +9850,8 @@
         </a:p>
       </dsp:txBody>
       <dsp:txXfrm>
-        <a:off x="313582" y="60153"/>
-        <a:ext cx="4136520" cy="293016"/>
+        <a:off x="333326" y="26184"/>
+        <a:ext cx="4366829" cy="346292"/>
       </dsp:txXfrm>
     </dsp:sp>
     <dsp:sp modelId="{0015AC33-EE3C-46AF-823F-B68E35675FAF}">
@@ -9853,8 +9861,8 @@
       </dsp:nvSpPr>
       <dsp:spPr>
         <a:xfrm>
-          <a:off x="0" y="956834"/>
-          <a:ext cx="5954607" cy="528412"/>
+          <a:off x="0" y="1034710"/>
+          <a:ext cx="6291852" cy="573300"/>
         </a:xfrm>
         <a:prstGeom prst="rect">
           <a:avLst/>
@@ -9894,7 +9902,7 @@
         <a:fontRef idx="minor"/>
       </dsp:style>
       <dsp:txBody>
-        <a:bodyPr spcFirstLastPara="0" vert="horz" wrap="square" lIns="462144" tIns="229108" rIns="462144" bIns="99568" numCol="1" spcCol="1270" anchor="t" anchorCtr="0">
+        <a:bodyPr spcFirstLastPara="0" vert="horz" wrap="square" lIns="488318" tIns="270764" rIns="488318" bIns="99568" numCol="1" spcCol="1270" anchor="t" anchorCtr="0">
           <a:noAutofit/>
         </a:bodyPr>
         <a:lstStyle/>
@@ -9923,8 +9931,8 @@
         </a:p>
       </dsp:txBody>
       <dsp:txXfrm>
-        <a:off x="0" y="956834"/>
-        <a:ext cx="5954607" cy="528412"/>
+        <a:off x="0" y="1034710"/>
+        <a:ext cx="6291852" cy="573300"/>
       </dsp:txXfrm>
     </dsp:sp>
     <dsp:sp modelId="{6AB3107F-F726-47ED-BE8B-03DB3A08866F}">
@@ -9934,8 +9942,8 @@
       </dsp:nvSpPr>
       <dsp:spPr>
         <a:xfrm>
-          <a:off x="297730" y="794474"/>
-          <a:ext cx="4168224" cy="324720"/>
+          <a:off x="314592" y="842830"/>
+          <a:ext cx="4404297" cy="383760"/>
         </a:xfrm>
         <a:prstGeom prst="roundRect">
           <a:avLst/>
@@ -9976,7 +9984,7 @@
         </a:fontRef>
       </dsp:style>
       <dsp:txBody>
-        <a:bodyPr spcFirstLastPara="0" vert="horz" wrap="square" lIns="157549" tIns="0" rIns="157549" bIns="0" numCol="1" spcCol="1270" anchor="ctr" anchorCtr="0">
+        <a:bodyPr spcFirstLastPara="0" vert="horz" wrap="square" lIns="166472" tIns="0" rIns="166472" bIns="0" numCol="1" spcCol="1270" anchor="ctr" anchorCtr="0">
           <a:noAutofit/>
         </a:bodyPr>
         <a:lstStyle/>
@@ -9995,14 +10003,18 @@
           </a:pPr>
           <a:r>
             <a:rPr lang="en-SG" sz="2000" b="1" kern="1200" dirty="0"/>
-            <a:t>Periodically retrain</a:t>
+            <a:t>Periodically retrain </a:t>
           </a:r>
-          <a:endParaRPr lang="en-SG" sz="2000" kern="1200" dirty="0"/>
+          <a:r>
+            <a:rPr lang="en-SG" sz="1000" b="0" kern="1200" dirty="0"/>
+            <a:t>(not implemented here)</a:t>
+          </a:r>
+          <a:endParaRPr lang="en-SG" sz="1000" kern="1200" dirty="0"/>
         </a:p>
       </dsp:txBody>
       <dsp:txXfrm>
-        <a:off x="313582" y="810326"/>
-        <a:ext cx="4136520" cy="293016"/>
+        <a:off x="333326" y="861564"/>
+        <a:ext cx="4366829" cy="346292"/>
       </dsp:txXfrm>
     </dsp:sp>
     <dsp:sp modelId="{E6739AA9-A3F5-4776-953F-276D1191D144}">
@@ -10012,8 +10024,8 @@
       </dsp:nvSpPr>
       <dsp:spPr>
         <a:xfrm>
-          <a:off x="0" y="1707006"/>
-          <a:ext cx="5954607" cy="528412"/>
+          <a:off x="0" y="1870090"/>
+          <a:ext cx="6291852" cy="573300"/>
         </a:xfrm>
         <a:prstGeom prst="rect">
           <a:avLst/>
@@ -10053,7 +10065,7 @@
         <a:fontRef idx="minor"/>
       </dsp:style>
       <dsp:txBody>
-        <a:bodyPr spcFirstLastPara="0" vert="horz" wrap="square" lIns="462144" tIns="229108" rIns="462144" bIns="99568" numCol="1" spcCol="1270" anchor="t" anchorCtr="0">
+        <a:bodyPr spcFirstLastPara="0" vert="horz" wrap="square" lIns="488318" tIns="270764" rIns="488318" bIns="99568" numCol="1" spcCol="1270" anchor="t" anchorCtr="0">
           <a:noAutofit/>
         </a:bodyPr>
         <a:lstStyle/>
@@ -10086,8 +10098,8 @@
         </a:p>
       </dsp:txBody>
       <dsp:txXfrm>
-        <a:off x="0" y="1707006"/>
-        <a:ext cx="5954607" cy="528412"/>
+        <a:off x="0" y="1870090"/>
+        <a:ext cx="6291852" cy="573300"/>
       </dsp:txXfrm>
     </dsp:sp>
     <dsp:sp modelId="{0F89FA63-9572-4E2E-A99D-6E4F146A4869}">
@@ -10097,8 +10109,8 @@
       </dsp:nvSpPr>
       <dsp:spPr>
         <a:xfrm>
-          <a:off x="297730" y="1544646"/>
-          <a:ext cx="4168224" cy="324720"/>
+          <a:off x="314592" y="1678210"/>
+          <a:ext cx="4404297" cy="383760"/>
         </a:xfrm>
         <a:prstGeom prst="roundRect">
           <a:avLst/>
@@ -10139,7 +10151,7 @@
         </a:fontRef>
       </dsp:style>
       <dsp:txBody>
-        <a:bodyPr spcFirstLastPara="0" vert="horz" wrap="square" lIns="157549" tIns="0" rIns="157549" bIns="0" numCol="1" spcCol="1270" anchor="ctr" anchorCtr="0">
+        <a:bodyPr spcFirstLastPara="0" vert="horz" wrap="square" lIns="166472" tIns="0" rIns="166472" bIns="0" numCol="1" spcCol="1270" anchor="ctr" anchorCtr="0">
           <a:noAutofit/>
         </a:bodyPr>
         <a:lstStyle/>
@@ -10164,8 +10176,8 @@
         </a:p>
       </dsp:txBody>
       <dsp:txXfrm>
-        <a:off x="313582" y="1560498"/>
-        <a:ext cx="4136520" cy="293016"/>
+        <a:off x="333326" y="1696944"/>
+        <a:ext cx="4366829" cy="346292"/>
       </dsp:txXfrm>
     </dsp:sp>
     <dsp:sp modelId="{E11EC25D-5807-4290-B496-C3ADAF1B2514}">
@@ -10175,8 +10187,8 @@
       </dsp:nvSpPr>
       <dsp:spPr>
         <a:xfrm>
-          <a:off x="0" y="2457179"/>
-          <a:ext cx="5954607" cy="528412"/>
+          <a:off x="0" y="2705470"/>
+          <a:ext cx="6291852" cy="573300"/>
         </a:xfrm>
         <a:prstGeom prst="rect">
           <a:avLst/>
@@ -10216,7 +10228,7 @@
         <a:fontRef idx="minor"/>
       </dsp:style>
       <dsp:txBody>
-        <a:bodyPr spcFirstLastPara="0" vert="horz" wrap="square" lIns="462144" tIns="229108" rIns="462144" bIns="99568" numCol="1" spcCol="1270" anchor="t" anchorCtr="0">
+        <a:bodyPr spcFirstLastPara="0" vert="horz" wrap="square" lIns="488318" tIns="270764" rIns="488318" bIns="99568" numCol="1" spcCol="1270" anchor="t" anchorCtr="0">
           <a:noAutofit/>
         </a:bodyPr>
         <a:lstStyle/>
@@ -10249,8 +10261,8 @@
         </a:p>
       </dsp:txBody>
       <dsp:txXfrm>
-        <a:off x="0" y="2457179"/>
-        <a:ext cx="5954607" cy="528412"/>
+        <a:off x="0" y="2705470"/>
+        <a:ext cx="6291852" cy="573300"/>
       </dsp:txXfrm>
     </dsp:sp>
     <dsp:sp modelId="{337C172A-0F11-46C7-9F36-39E1B31326BF}">
@@ -10260,8 +10272,8 @@
       </dsp:nvSpPr>
       <dsp:spPr>
         <a:xfrm>
-          <a:off x="297730" y="2294819"/>
-          <a:ext cx="4168224" cy="324720"/>
+          <a:off x="314592" y="2513590"/>
+          <a:ext cx="4404297" cy="383760"/>
         </a:xfrm>
         <a:prstGeom prst="roundRect">
           <a:avLst/>
@@ -10302,7 +10314,7 @@
         </a:fontRef>
       </dsp:style>
       <dsp:txBody>
-        <a:bodyPr spcFirstLastPara="0" vert="horz" wrap="square" lIns="157549" tIns="0" rIns="157549" bIns="0" numCol="1" spcCol="1270" anchor="ctr" anchorCtr="0">
+        <a:bodyPr spcFirstLastPara="0" vert="horz" wrap="square" lIns="166472" tIns="0" rIns="166472" bIns="0" numCol="1" spcCol="1270" anchor="ctr" anchorCtr="0">
           <a:noAutofit/>
         </a:bodyPr>
         <a:lstStyle/>
@@ -10327,8 +10339,8 @@
         </a:p>
       </dsp:txBody>
       <dsp:txXfrm>
-        <a:off x="313582" y="2310671"/>
-        <a:ext cx="4136520" cy="293016"/>
+        <a:off x="333326" y="2532324"/>
+        <a:ext cx="4366829" cy="346292"/>
       </dsp:txXfrm>
     </dsp:sp>
     <dsp:sp modelId="{CD59ACE8-7D59-4F3D-BA52-17F554211FC1}">
@@ -10338,8 +10350,8 @@
       </dsp:nvSpPr>
       <dsp:spPr>
         <a:xfrm>
-          <a:off x="0" y="3207351"/>
-          <a:ext cx="5954607" cy="528412"/>
+          <a:off x="0" y="3540850"/>
+          <a:ext cx="6291852" cy="573300"/>
         </a:xfrm>
         <a:prstGeom prst="rect">
           <a:avLst/>
@@ -10379,7 +10391,7 @@
         <a:fontRef idx="minor"/>
       </dsp:style>
       <dsp:txBody>
-        <a:bodyPr spcFirstLastPara="0" vert="horz" wrap="square" lIns="462144" tIns="229108" rIns="462144" bIns="99568" numCol="1" spcCol="1270" anchor="t" anchorCtr="0">
+        <a:bodyPr spcFirstLastPara="0" vert="horz" wrap="square" lIns="488318" tIns="270764" rIns="488318" bIns="99568" numCol="1" spcCol="1270" anchor="t" anchorCtr="0">
           <a:noAutofit/>
         </a:bodyPr>
         <a:lstStyle/>
@@ -10407,8 +10419,8 @@
         </a:p>
       </dsp:txBody>
       <dsp:txXfrm>
-        <a:off x="0" y="3207351"/>
-        <a:ext cx="5954607" cy="528412"/>
+        <a:off x="0" y="3540850"/>
+        <a:ext cx="6291852" cy="573300"/>
       </dsp:txXfrm>
     </dsp:sp>
     <dsp:sp modelId="{3ED1DD18-467D-4FA5-887D-22B85F20B566}">
@@ -10418,8 +10430,8 @@
       </dsp:nvSpPr>
       <dsp:spPr>
         <a:xfrm>
-          <a:off x="297730" y="3044991"/>
-          <a:ext cx="4168224" cy="324720"/>
+          <a:off x="314592" y="3348970"/>
+          <a:ext cx="4404297" cy="383760"/>
         </a:xfrm>
         <a:prstGeom prst="roundRect">
           <a:avLst/>
@@ -10460,7 +10472,7 @@
         </a:fontRef>
       </dsp:style>
       <dsp:txBody>
-        <a:bodyPr spcFirstLastPara="0" vert="horz" wrap="square" lIns="157549" tIns="0" rIns="157549" bIns="0" numCol="1" spcCol="1270" anchor="ctr" anchorCtr="0">
+        <a:bodyPr spcFirstLastPara="0" vert="horz" wrap="square" lIns="166472" tIns="0" rIns="166472" bIns="0" numCol="1" spcCol="1270" anchor="ctr" anchorCtr="0">
           <a:noAutofit/>
         </a:bodyPr>
         <a:lstStyle/>
@@ -10485,8 +10497,8 @@
         </a:p>
       </dsp:txBody>
       <dsp:txXfrm>
-        <a:off x="313582" y="3060843"/>
-        <a:ext cx="4136520" cy="293016"/>
+        <a:off x="333326" y="3367704"/>
+        <a:ext cx="4366829" cy="346292"/>
       </dsp:txXfrm>
     </dsp:sp>
     <dsp:sp modelId="{6E44D9C8-612D-48C4-A1F5-B35EB236BF5C}">
@@ -10496,8 +10508,8 @@
       </dsp:nvSpPr>
       <dsp:spPr>
         <a:xfrm>
-          <a:off x="0" y="3957524"/>
-          <a:ext cx="5954607" cy="528412"/>
+          <a:off x="0" y="4376230"/>
+          <a:ext cx="6291852" cy="573300"/>
         </a:xfrm>
         <a:prstGeom prst="rect">
           <a:avLst/>
@@ -10537,7 +10549,7 @@
         <a:fontRef idx="minor"/>
       </dsp:style>
       <dsp:txBody>
-        <a:bodyPr spcFirstLastPara="0" vert="horz" wrap="square" lIns="462144" tIns="229108" rIns="462144" bIns="99568" numCol="1" spcCol="1270" anchor="t" anchorCtr="0">
+        <a:bodyPr spcFirstLastPara="0" vert="horz" wrap="square" lIns="488318" tIns="270764" rIns="488318" bIns="99568" numCol="1" spcCol="1270" anchor="t" anchorCtr="0">
           <a:noAutofit/>
         </a:bodyPr>
         <a:lstStyle/>
@@ -10566,8 +10578,8 @@
         </a:p>
       </dsp:txBody>
       <dsp:txXfrm>
-        <a:off x="0" y="3957524"/>
-        <a:ext cx="5954607" cy="528412"/>
+        <a:off x="0" y="4376230"/>
+        <a:ext cx="6291852" cy="573300"/>
       </dsp:txXfrm>
     </dsp:sp>
     <dsp:sp modelId="{5A467C53-D8CA-4623-B69F-62B06F4C19F3}">
@@ -10577,8 +10589,8 @@
       </dsp:nvSpPr>
       <dsp:spPr>
         <a:xfrm>
-          <a:off x="297730" y="3795164"/>
-          <a:ext cx="4168224" cy="324720"/>
+          <a:off x="314592" y="4184350"/>
+          <a:ext cx="4404297" cy="383760"/>
         </a:xfrm>
         <a:prstGeom prst="roundRect">
           <a:avLst/>
@@ -10619,7 +10631,7 @@
         </a:fontRef>
       </dsp:style>
       <dsp:txBody>
-        <a:bodyPr spcFirstLastPara="0" vert="horz" wrap="square" lIns="157549" tIns="0" rIns="157549" bIns="0" numCol="1" spcCol="1270" anchor="ctr" anchorCtr="0">
+        <a:bodyPr spcFirstLastPara="0" vert="horz" wrap="square" lIns="166472" tIns="0" rIns="166472" bIns="0" numCol="1" spcCol="1270" anchor="ctr" anchorCtr="0">
           <a:noAutofit/>
         </a:bodyPr>
         <a:lstStyle/>
@@ -10638,14 +10650,18 @@
           </a:pPr>
           <a:r>
             <a:rPr lang="en-SG" sz="2000" b="1" kern="1200" dirty="0"/>
-            <a:t>Business rules</a:t>
+            <a:t>Business rules </a:t>
           </a:r>
-          <a:endParaRPr lang="en-SG" sz="2000" kern="1200" dirty="0"/>
+          <a:r>
+            <a:rPr lang="en-SG" sz="1000" b="0" kern="1200" dirty="0"/>
+            <a:t>(not implemented here)</a:t>
+          </a:r>
+          <a:endParaRPr lang="en-SG" sz="1000" kern="1200" dirty="0"/>
         </a:p>
       </dsp:txBody>
       <dsp:txXfrm>
-        <a:off x="313582" y="3811016"/>
-        <a:ext cx="4136520" cy="293016"/>
+        <a:off x="333326" y="4203084"/>
+        <a:ext cx="4366829" cy="346292"/>
       </dsp:txXfrm>
     </dsp:sp>
   </dsp:spTree>
@@ -19514,7 +19530,7 @@
           <a:p>
             <a:fld id="{840FFE86-F4EF-4C24-B61E-A4ACE1AB3F28}" type="datetimeFigureOut">
               <a:rPr lang="en-SG" smtClean="0"/>
-              <a:t>30/3/2026</a:t>
+              <a:t>31/3/2026</a:t>
             </a:fld>
             <a:endParaRPr lang="en-SG" dirty="0"/>
           </a:p>
@@ -20152,7 +20168,7 @@
           <a:p>
             <a:fld id="{DA1CC2BE-6A0F-4071-BFB7-8FB97E7BF62D}" type="datetimeFigureOut">
               <a:rPr lang="en-SG" smtClean="0"/>
-              <a:t>30/3/2026</a:t>
+              <a:t>31/3/2026</a:t>
             </a:fld>
             <a:endParaRPr lang="en-SG" dirty="0"/>
           </a:p>
@@ -20497,7 +20513,7 @@
           <a:p>
             <a:fld id="{DA1CC2BE-6A0F-4071-BFB7-8FB97E7BF62D}" type="datetimeFigureOut">
               <a:rPr lang="en-SG" smtClean="0"/>
-              <a:t>30/3/2026</a:t>
+              <a:t>31/3/2026</a:t>
             </a:fld>
             <a:endParaRPr lang="en-SG" dirty="0"/>
           </a:p>
@@ -20905,7 +20921,7 @@
           <a:p>
             <a:fld id="{DA1CC2BE-6A0F-4071-BFB7-8FB97E7BF62D}" type="datetimeFigureOut">
               <a:rPr lang="en-SG" smtClean="0"/>
-              <a:t>30/3/2026</a:t>
+              <a:t>31/3/2026</a:t>
             </a:fld>
             <a:endParaRPr lang="en-SG" dirty="0"/>
           </a:p>
@@ -21248,7 +21264,7 @@
           <a:p>
             <a:fld id="{DA1CC2BE-6A0F-4071-BFB7-8FB97E7BF62D}" type="datetimeFigureOut">
               <a:rPr lang="en-SG" smtClean="0"/>
-              <a:t>30/3/2026</a:t>
+              <a:t>31/3/2026</a:t>
             </a:fld>
             <a:endParaRPr lang="en-SG" dirty="0"/>
           </a:p>
@@ -21575,7 +21591,7 @@
           <a:p>
             <a:fld id="{DA1CC2BE-6A0F-4071-BFB7-8FB97E7BF62D}" type="datetimeFigureOut">
               <a:rPr lang="en-SG" smtClean="0"/>
-              <a:t>30/3/2026</a:t>
+              <a:t>31/3/2026</a:t>
             </a:fld>
             <a:endParaRPr lang="en-SG" dirty="0"/>
           </a:p>
@@ -21978,7 +21994,7 @@
           <a:p>
             <a:fld id="{DA1CC2BE-6A0F-4071-BFB7-8FB97E7BF62D}" type="datetimeFigureOut">
               <a:rPr lang="en-SG" smtClean="0"/>
-              <a:t>30/3/2026</a:t>
+              <a:t>31/3/2026</a:t>
             </a:fld>
             <a:endParaRPr lang="en-SG" dirty="0"/>
           </a:p>
@@ -22242,7 +22258,7 @@
           <a:p>
             <a:fld id="{DA1CC2BE-6A0F-4071-BFB7-8FB97E7BF62D}" type="datetimeFigureOut">
               <a:rPr lang="en-SG" smtClean="0"/>
-              <a:t>30/3/2026</a:t>
+              <a:t>31/3/2026</a:t>
             </a:fld>
             <a:endParaRPr lang="en-SG" dirty="0"/>
           </a:p>
@@ -22511,7 +22527,7 @@
           <a:p>
             <a:fld id="{DA1CC2BE-6A0F-4071-BFB7-8FB97E7BF62D}" type="datetimeFigureOut">
               <a:rPr lang="en-SG" smtClean="0"/>
-              <a:t>30/3/2026</a:t>
+              <a:t>31/3/2026</a:t>
             </a:fld>
             <a:endParaRPr lang="en-SG" dirty="0"/>
           </a:p>
@@ -22775,7 +22791,7 @@
           <a:p>
             <a:fld id="{DA1CC2BE-6A0F-4071-BFB7-8FB97E7BF62D}" type="datetimeFigureOut">
               <a:rPr lang="en-SG" smtClean="0"/>
-              <a:t>30/3/2026</a:t>
+              <a:t>31/3/2026</a:t>
             </a:fld>
             <a:endParaRPr lang="en-SG" dirty="0"/>
           </a:p>
@@ -22955,7 +22971,7 @@
           <a:p>
             <a:fld id="{DA1CC2BE-6A0F-4071-BFB7-8FB97E7BF62D}" type="datetimeFigureOut">
               <a:rPr lang="en-SG" smtClean="0"/>
-              <a:t>30/3/2026</a:t>
+              <a:t>31/3/2026</a:t>
             </a:fld>
             <a:endParaRPr lang="en-SG" dirty="0"/>
           </a:p>
@@ -23291,7 +23307,7 @@
           <a:p>
             <a:fld id="{DA1CC2BE-6A0F-4071-BFB7-8FB97E7BF62D}" type="datetimeFigureOut">
               <a:rPr lang="en-SG" smtClean="0"/>
-              <a:t>30/3/2026</a:t>
+              <a:t>31/3/2026</a:t>
             </a:fld>
             <a:endParaRPr lang="en-SG" dirty="0"/>
           </a:p>
@@ -23621,7 +23637,7 @@
           <a:p>
             <a:fld id="{DA1CC2BE-6A0F-4071-BFB7-8FB97E7BF62D}" type="datetimeFigureOut">
               <a:rPr lang="en-SG" smtClean="0"/>
-              <a:t>30/3/2026</a:t>
+              <a:t>31/3/2026</a:t>
             </a:fld>
             <a:endParaRPr lang="en-SG" dirty="0"/>
           </a:p>
@@ -24085,7 +24101,7 @@
           <a:p>
             <a:fld id="{DA1CC2BE-6A0F-4071-BFB7-8FB97E7BF62D}" type="datetimeFigureOut">
               <a:rPr lang="en-SG" smtClean="0"/>
-              <a:t>30/3/2026</a:t>
+              <a:t>31/3/2026</a:t>
             </a:fld>
             <a:endParaRPr lang="en-SG" dirty="0"/>
           </a:p>
@@ -24297,7 +24313,7 @@
           <a:p>
             <a:fld id="{DA1CC2BE-6A0F-4071-BFB7-8FB97E7BF62D}" type="datetimeFigureOut">
               <a:rPr lang="en-SG" smtClean="0"/>
-              <a:t>30/3/2026</a:t>
+              <a:t>31/3/2026</a:t>
             </a:fld>
             <a:endParaRPr lang="en-SG" dirty="0"/>
           </a:p>
@@ -24481,7 +24497,7 @@
           <a:p>
             <a:fld id="{DA1CC2BE-6A0F-4071-BFB7-8FB97E7BF62D}" type="datetimeFigureOut">
               <a:rPr lang="en-SG" smtClean="0"/>
-              <a:t>30/3/2026</a:t>
+              <a:t>31/3/2026</a:t>
             </a:fld>
             <a:endParaRPr lang="en-SG" dirty="0"/>
           </a:p>
@@ -24821,7 +24837,7 @@
           <a:p>
             <a:fld id="{DA1CC2BE-6A0F-4071-BFB7-8FB97E7BF62D}" type="datetimeFigureOut">
               <a:rPr lang="en-SG" smtClean="0"/>
-              <a:t>30/3/2026</a:t>
+              <a:t>31/3/2026</a:t>
             </a:fld>
             <a:endParaRPr lang="en-SG" dirty="0"/>
           </a:p>
@@ -25172,7 +25188,7 @@
           <a:p>
             <a:fld id="{DA1CC2BE-6A0F-4071-BFB7-8FB97E7BF62D}" type="datetimeFigureOut">
               <a:rPr lang="en-SG" smtClean="0"/>
-              <a:t>30/3/2026</a:t>
+              <a:t>31/3/2026</a:t>
             </a:fld>
             <a:endParaRPr lang="en-SG" dirty="0"/>
           </a:p>
@@ -27471,7 +27487,7 @@
           <a:p>
             <a:fld id="{DA1CC2BE-6A0F-4071-BFB7-8FB97E7BF62D}" type="datetimeFigureOut">
               <a:rPr lang="en-SG" smtClean="0"/>
-              <a:t>30/3/2026</a:t>
+              <a:t>31/3/2026</a:t>
             </a:fld>
             <a:endParaRPr lang="en-SG" dirty="0"/>
           </a:p>
@@ -29601,14 +29617,14 @@
             <p:ph sz="quarter" idx="13"/>
             <p:extLst>
               <p:ext uri="{D42A27DB-BD31-4B8C-83A1-F6EECF244321}">
-                <p14:modId xmlns:p14="http://schemas.microsoft.com/office/powerpoint/2010/main" val="601828592"/>
+                <p14:modId xmlns:p14="http://schemas.microsoft.com/office/powerpoint/2010/main" val="2679895363"/>
               </p:ext>
             </p:extLst>
           </p:nvPr>
         </p:nvGraphicFramePr>
         <p:xfrm>
-          <a:off x="1514705" y="1284936"/>
-          <a:ext cx="5954607" cy="4530238"/>
+          <a:off x="1951445" y="1402723"/>
+          <a:ext cx="6291853" cy="4956980"/>
         </p:xfrm>
         <a:graphic>
           <a:graphicData uri="http://schemas.openxmlformats.org/drawingml/2006/diagram">
@@ -29630,8 +29646,8 @@
         </p:nvSpPr>
         <p:spPr>
           <a:xfrm>
-            <a:off x="7574936" y="1407559"/>
-            <a:ext cx="264246" cy="4253502"/>
+            <a:off x="8476179" y="1500797"/>
+            <a:ext cx="222610" cy="4858905"/>
           </a:xfrm>
           <a:prstGeom prst="downArrow">
             <a:avLst/>
